--- a/presentation/IMDb_Business_Case_Presentation.pptx
+++ b/presentation/IMDb_Business_Case_Presentation.pptx
@@ -20,6 +20,26 @@
     <p:sldId id="268" r:id="rId19"/>
     <p:sldId id="269" r:id="rId20"/>
     <p:sldId id="270" r:id="rId21"/>
+    <p:sldId id="271" r:id="rId22"/>
+    <p:sldId id="272" r:id="rId23"/>
+    <p:sldId id="273" r:id="rId24"/>
+    <p:sldId id="274" r:id="rId25"/>
+    <p:sldId id="275" r:id="rId26"/>
+    <p:sldId id="276" r:id="rId27"/>
+    <p:sldId id="277" r:id="rId28"/>
+    <p:sldId id="278" r:id="rId29"/>
+    <p:sldId id="279" r:id="rId30"/>
+    <p:sldId id="280" r:id="rId31"/>
+    <p:sldId id="281" r:id="rId32"/>
+    <p:sldId id="282" r:id="rId33"/>
+    <p:sldId id="283" r:id="rId34"/>
+    <p:sldId id="284" r:id="rId35"/>
+    <p:sldId id="285" r:id="rId36"/>
+    <p:sldId id="286" r:id="rId37"/>
+    <p:sldId id="287" r:id="rId38"/>
+    <p:sldId id="288" r:id="rId39"/>
+    <p:sldId id="289" r:id="rId40"/>
+    <p:sldId id="290" r:id="rId41"/>
   </p:sldIdLst>
   <p:sldSz cx="9144000" cy="6858000" type="screen4x3"/>
   <p:notesSz cx="6858000" cy="9144000"/>
@@ -4354,6 +4374,450 @@
 </p:sld>
 </file>
 
+<file path=ppt/slides/slide16.xml><?xml version="1.0" encoding="utf-8"?>
+<p:sld xmlns:a="http://schemas.openxmlformats.org/drawingml/2006/main" xmlns:p="http://schemas.openxmlformats.org/presentationml/2006/main" xmlns:r="http://schemas.openxmlformats.org/officeDocument/2006/relationships">
+  <p:cSld>
+    <p:spTree>
+      <p:nvGrpSpPr>
+        <p:cNvPr id="1" name=""/>
+        <p:cNvGrpSpPr/>
+        <p:nvPr/>
+      </p:nvGrpSpPr>
+      <p:grpSpPr/>
+      <p:sp>
+        <p:nvSpPr>
+          <p:cNvPr id="2" name="TextBox 1"/>
+          <p:cNvSpPr txBox="1"/>
+          <p:nvPr/>
+        </p:nvSpPr>
+        <p:spPr>
+          <a:xfrm>
+            <a:off x="457200" y="365760"/>
+            <a:ext cx="8229600" cy="731520"/>
+          </a:xfrm>
+          <a:prstGeom prst="rect">
+            <a:avLst/>
+          </a:prstGeom>
+          <a:noFill/>
+        </p:spPr>
+        <p:txBody>
+          <a:bodyPr wrap="none">
+            <a:spAutoFit/>
+          </a:bodyPr>
+          <a:lstStyle/>
+          <a:p>
+            <a:pPr>
+              <a:defRPr sz="4000" b="1">
+                <a:solidFill>
+                  <a:srgbClr val="1F4E79"/>
+                </a:solidFill>
+              </a:defRPr>
+            </a:pPr>
+            <a:r>
+              <a:t>Data Quality: Vote Filtering Strategy</a:t>
+            </a:r>
+          </a:p>
+        </p:txBody>
+      </p:sp>
+      <p:sp>
+        <p:nvSpPr>
+          <p:cNvPr id="3" name="TextBox 2"/>
+          <p:cNvSpPr txBox="1"/>
+          <p:nvPr/>
+        </p:nvSpPr>
+        <p:spPr>
+          <a:xfrm>
+            <a:off x="640080" y="1280160"/>
+            <a:ext cx="7863840" cy="4572000"/>
+          </a:xfrm>
+          <a:prstGeom prst="rect">
+            <a:avLst/>
+          </a:prstGeom>
+          <a:noFill/>
+        </p:spPr>
+        <p:txBody>
+          <a:bodyPr wrap="square">
+            <a:spAutoFit/>
+          </a:bodyPr>
+          <a:lstStyle/>
+          <a:p>
+            <a:pPr>
+              <a:spcBef>
+                <a:spcPts val="300"/>
+              </a:spcBef>
+              <a:spcAft>
+                <a:spcPts val="300"/>
+              </a:spcAft>
+              <a:defRPr b="1" sz="2000"/>
+            </a:pPr>
+            <a:r>
+              <a:t>Why Vote Filtering?</a:t>
+            </a:r>
+          </a:p>
+          <a:p>
+            <a:pPr>
+              <a:spcBef>
+                <a:spcPts val="300"/>
+              </a:spcBef>
+              <a:spcAft>
+                <a:spcPts val="300"/>
+              </a:spcAft>
+              <a:defRPr sz="1600"/>
+            </a:pPr>
+            <a:r>
+              <a:t>  - Movies with &lt;500 votes have unstable ratings</a:t>
+            </a:r>
+          </a:p>
+          <a:p>
+            <a:pPr>
+              <a:spcBef>
+                <a:spcPts val="300"/>
+              </a:spcBef>
+              <a:spcAft>
+                <a:spcPts val="300"/>
+              </a:spcAft>
+              <a:defRPr sz="1600"/>
+            </a:pPr>
+            <a:r>
+              <a:t>  - Applied at two levels for different purposes:</a:t>
+            </a:r>
+          </a:p>
+          <a:p>
+            <a:pPr>
+              <a:spcBef>
+                <a:spcPts val="300"/>
+              </a:spcBef>
+              <a:spcAft>
+                <a:spcPts val="300"/>
+              </a:spcAft>
+              <a:defRPr sz="1600"/>
+            </a:pPr>
+            <a:r>
+              <a:t>    * 500+ votes: Exploratory analysis</a:t>
+            </a:r>
+          </a:p>
+          <a:p>
+            <a:pPr>
+              <a:spcBef>
+                <a:spcPts val="300"/>
+              </a:spcBef>
+              <a:spcAft>
+                <a:spcPts val="300"/>
+              </a:spcAft>
+              <a:defRPr sz="1600"/>
+            </a:pPr>
+            <a:r>
+              <a:t>    * 900+ votes: Predictive modeling</a:t>
+            </a:r>
+          </a:p>
+          <a:p>
+            <a:pPr>
+              <a:spcBef>
+                <a:spcPts val="300"/>
+              </a:spcBef>
+              <a:spcAft>
+                <a:spcPts val="300"/>
+              </a:spcAft>
+              <a:defRPr sz="1600"/>
+            </a:pPr>
+          </a:p>
+          <a:p>
+            <a:pPr>
+              <a:spcBef>
+                <a:spcPts val="300"/>
+              </a:spcBef>
+              <a:spcAft>
+                <a:spcPts val="300"/>
+              </a:spcAft>
+              <a:defRPr b="1" sz="2000"/>
+            </a:pPr>
+            <a:r>
+              <a:t>Dataset Impact</a:t>
+            </a:r>
+          </a:p>
+          <a:p>
+            <a:pPr>
+              <a:spcBef>
+                <a:spcPts val="300"/>
+              </a:spcBef>
+              <a:spcAft>
+                <a:spcPts val="300"/>
+              </a:spcAft>
+              <a:defRPr sz="1600"/>
+            </a:pPr>
+            <a:r>
+              <a:t>  - Original: 330,970 movies</a:t>
+            </a:r>
+          </a:p>
+          <a:p>
+            <a:pPr>
+              <a:spcBef>
+                <a:spcPts val="300"/>
+              </a:spcBef>
+              <a:spcAft>
+                <a:spcPts val="300"/>
+              </a:spcAft>
+              <a:defRPr sz="1600"/>
+            </a:pPr>
+            <a:r>
+              <a:t>  - 500+ filter: 264,776 movies (80.1% retained)</a:t>
+            </a:r>
+          </a:p>
+          <a:p>
+            <a:pPr>
+              <a:spcBef>
+                <a:spcPts val="300"/>
+              </a:spcBef>
+              <a:spcAft>
+                <a:spcPts val="300"/>
+              </a:spcAft>
+              <a:defRPr sz="1600"/>
+            </a:pPr>
+            <a:r>
+              <a:t>  - 900+ filter: ~215,000 movies (65% retained)</a:t>
+            </a:r>
+          </a:p>
+        </p:txBody>
+      </p:sp>
+    </p:spTree>
+  </p:cSld>
+  <p:clrMapOvr>
+    <a:masterClrMapping/>
+  </p:clrMapOvr>
+</p:sld>
+</file>
+
+<file path=ppt/slides/slide17.xml><?xml version="1.0" encoding="utf-8"?>
+<p:sld xmlns:a="http://schemas.openxmlformats.org/drawingml/2006/main" xmlns:p="http://schemas.openxmlformats.org/presentationml/2006/main" xmlns:r="http://schemas.openxmlformats.org/officeDocument/2006/relationships">
+  <p:cSld>
+    <p:spTree>
+      <p:nvGrpSpPr>
+        <p:cNvPr id="1" name=""/>
+        <p:cNvGrpSpPr/>
+        <p:nvPr/>
+      </p:nvGrpSpPr>
+      <p:grpSpPr/>
+      <p:sp>
+        <p:nvSpPr>
+          <p:cNvPr id="2" name="TextBox 1"/>
+          <p:cNvSpPr txBox="1"/>
+          <p:nvPr/>
+        </p:nvSpPr>
+        <p:spPr>
+          <a:xfrm>
+            <a:off x="457200" y="274320"/>
+            <a:ext cx="8229600" cy="548640"/>
+          </a:xfrm>
+          <a:prstGeom prst="rect">
+            <a:avLst/>
+          </a:prstGeom>
+          <a:noFill/>
+        </p:spPr>
+        <p:txBody>
+          <a:bodyPr wrap="none">
+            <a:spAutoFit/>
+          </a:bodyPr>
+          <a:lstStyle/>
+          <a:p>
+            <a:pPr>
+              <a:defRPr sz="3200" b="1">
+                <a:solidFill>
+                  <a:srgbClr val="1F4E79"/>
+                </a:solidFill>
+              </a:defRPr>
+            </a:pPr>
+            <a:r>
+              <a:t>Filter Impact: Dataset Size &amp; Rating Quality</a:t>
+            </a:r>
+          </a:p>
+        </p:txBody>
+      </p:sp>
+      <p:pic>
+        <p:nvPicPr>
+          <p:cNvPr id="3" name="Picture 2" descr="viz_stat_1_filter_impact.png"/>
+          <p:cNvPicPr>
+            <a:picLocks noChangeAspect="1"/>
+          </p:cNvPicPr>
+          <p:nvPr/>
+        </p:nvPicPr>
+        <p:blipFill>
+          <a:blip r:embed="rId2"/>
+          <a:stretch>
+            <a:fillRect/>
+          </a:stretch>
+        </p:blipFill>
+        <p:spPr>
+          <a:xfrm>
+            <a:off x="457200" y="914400"/>
+            <a:ext cx="8229600" cy="3479325"/>
+          </a:xfrm>
+          <a:prstGeom prst="rect">
+            <a:avLst/>
+          </a:prstGeom>
+        </p:spPr>
+      </p:pic>
+    </p:spTree>
+  </p:cSld>
+  <p:clrMapOvr>
+    <a:masterClrMapping/>
+  </p:clrMapOvr>
+</p:sld>
+</file>
+
+<file path=ppt/slides/slide18.xml><?xml version="1.0" encoding="utf-8"?>
+<p:sld xmlns:a="http://schemas.openxmlformats.org/drawingml/2006/main" xmlns:p="http://schemas.openxmlformats.org/presentationml/2006/main" xmlns:r="http://schemas.openxmlformats.org/officeDocument/2006/relationships">
+  <p:cSld>
+    <p:spTree>
+      <p:nvGrpSpPr>
+        <p:cNvPr id="1" name=""/>
+        <p:cNvGrpSpPr/>
+        <p:nvPr/>
+      </p:nvGrpSpPr>
+      <p:grpSpPr/>
+      <p:sp>
+        <p:nvSpPr>
+          <p:cNvPr id="2" name="TextBox 1"/>
+          <p:cNvSpPr txBox="1"/>
+          <p:nvPr/>
+        </p:nvSpPr>
+        <p:spPr>
+          <a:xfrm>
+            <a:off x="457200" y="274320"/>
+            <a:ext cx="8229600" cy="548640"/>
+          </a:xfrm>
+          <a:prstGeom prst="rect">
+            <a:avLst/>
+          </a:prstGeom>
+          <a:noFill/>
+        </p:spPr>
+        <p:txBody>
+          <a:bodyPr wrap="none">
+            <a:spAutoFit/>
+          </a:bodyPr>
+          <a:lstStyle/>
+          <a:p>
+            <a:pPr>
+              <a:defRPr sz="3200" b="1">
+                <a:solidFill>
+                  <a:srgbClr val="1F4E79"/>
+                </a:solidFill>
+              </a:defRPr>
+            </a:pPr>
+            <a:r>
+              <a:t>Rating Stability: Confidence in Filtered Ratings</a:t>
+            </a:r>
+          </a:p>
+        </p:txBody>
+      </p:sp>
+      <p:pic>
+        <p:nvPicPr>
+          <p:cNvPr id="3" name="Picture 2" descr="viz_stat_2_rating_stability.png"/>
+          <p:cNvPicPr>
+            <a:picLocks noChangeAspect="1"/>
+          </p:cNvPicPr>
+          <p:nvPr/>
+        </p:nvPicPr>
+        <p:blipFill>
+          <a:blip r:embed="rId2"/>
+          <a:stretch>
+            <a:fillRect/>
+          </a:stretch>
+        </p:blipFill>
+        <p:spPr>
+          <a:xfrm>
+            <a:off x="457200" y="914400"/>
+            <a:ext cx="8229600" cy="4779667"/>
+          </a:xfrm>
+          <a:prstGeom prst="rect">
+            <a:avLst/>
+          </a:prstGeom>
+        </p:spPr>
+      </p:pic>
+    </p:spTree>
+  </p:cSld>
+  <p:clrMapOvr>
+    <a:masterClrMapping/>
+  </p:clrMapOvr>
+</p:sld>
+</file>
+
+<file path=ppt/slides/slide19.xml><?xml version="1.0" encoding="utf-8"?>
+<p:sld xmlns:a="http://schemas.openxmlformats.org/drawingml/2006/main" xmlns:p="http://schemas.openxmlformats.org/presentationml/2006/main" xmlns:r="http://schemas.openxmlformats.org/officeDocument/2006/relationships">
+  <p:cSld>
+    <p:spTree>
+      <p:nvGrpSpPr>
+        <p:cNvPr id="1" name=""/>
+        <p:cNvGrpSpPr/>
+        <p:nvPr/>
+      </p:nvGrpSpPr>
+      <p:grpSpPr/>
+      <p:sp>
+        <p:nvSpPr>
+          <p:cNvPr id="2" name="TextBox 1"/>
+          <p:cNvSpPr txBox="1"/>
+          <p:nvPr/>
+        </p:nvSpPr>
+        <p:spPr>
+          <a:xfrm>
+            <a:off x="457200" y="274320"/>
+            <a:ext cx="8229600" cy="548640"/>
+          </a:xfrm>
+          <a:prstGeom prst="rect">
+            <a:avLst/>
+          </a:prstGeom>
+          <a:noFill/>
+        </p:spPr>
+        <p:txBody>
+          <a:bodyPr wrap="none">
+            <a:spAutoFit/>
+          </a:bodyPr>
+          <a:lstStyle/>
+          <a:p>
+            <a:pPr>
+              <a:defRPr sz="3200" b="1">
+                <a:solidFill>
+                  <a:srgbClr val="1F4E79"/>
+                </a:solidFill>
+              </a:defRPr>
+            </a:pPr>
+            <a:r>
+              <a:t>Model Performance: Prediction Accuracy Improvements</a:t>
+            </a:r>
+          </a:p>
+        </p:txBody>
+      </p:sp>
+      <p:pic>
+        <p:nvPicPr>
+          <p:cNvPr id="3" name="Picture 2" descr="viz_stat_3_model_performance.png"/>
+          <p:cNvPicPr>
+            <a:picLocks noChangeAspect="1"/>
+          </p:cNvPicPr>
+          <p:nvPr/>
+        </p:nvPicPr>
+        <p:blipFill>
+          <a:blip r:embed="rId2"/>
+          <a:stretch>
+            <a:fillRect/>
+          </a:stretch>
+        </p:blipFill>
+        <p:spPr>
+          <a:xfrm>
+            <a:off x="457200" y="914400"/>
+            <a:ext cx="8229600" cy="3479630"/>
+          </a:xfrm>
+          <a:prstGeom prst="rect">
+            <a:avLst/>
+          </a:prstGeom>
+        </p:spPr>
+      </p:pic>
+    </p:spTree>
+  </p:cSld>
+  <p:clrMapOvr>
+    <a:masterClrMapping/>
+  </p:clrMapOvr>
+</p:sld>
+</file>
+
 <file path=ppt/slides/slide2.xml><?xml version="1.0" encoding="utf-8"?>
 <p:sld xmlns:a="http://schemas.openxmlformats.org/drawingml/2006/main" xmlns:p="http://schemas.openxmlformats.org/presentationml/2006/main" xmlns:r="http://schemas.openxmlformats.org/officeDocument/2006/relationships">
   <p:cSld>
@@ -4529,6 +4993,921 @@
           </a:p>
         </p:txBody>
       </p:sp>
+    </p:spTree>
+  </p:cSld>
+  <p:clrMapOvr>
+    <a:masterClrMapping/>
+  </p:clrMapOvr>
+</p:sld>
+</file>
+
+<file path=ppt/slides/slide20.xml><?xml version="1.0" encoding="utf-8"?>
+<p:sld xmlns:a="http://schemas.openxmlformats.org/drawingml/2006/main" xmlns:p="http://schemas.openxmlformats.org/presentationml/2006/main" xmlns:r="http://schemas.openxmlformats.org/officeDocument/2006/relationships">
+  <p:cSld>
+    <p:spTree>
+      <p:nvGrpSpPr>
+        <p:cNvPr id="1" name=""/>
+        <p:cNvGrpSpPr/>
+        <p:nvPr/>
+      </p:nvGrpSpPr>
+      <p:grpSpPr/>
+      <p:sp>
+        <p:nvSpPr>
+          <p:cNvPr id="2" name="TextBox 1"/>
+          <p:cNvSpPr txBox="1"/>
+          <p:nvPr/>
+        </p:nvSpPr>
+        <p:spPr>
+          <a:xfrm>
+            <a:off x="457200" y="274320"/>
+            <a:ext cx="8229600" cy="548640"/>
+          </a:xfrm>
+          <a:prstGeom prst="rect">
+            <a:avLst/>
+          </a:prstGeom>
+          <a:noFill/>
+        </p:spPr>
+        <p:txBody>
+          <a:bodyPr wrap="none">
+            <a:spAutoFit/>
+          </a:bodyPr>
+          <a:lstStyle/>
+          <a:p>
+            <a:pPr>
+              <a:defRPr sz="3200" b="1">
+                <a:solidFill>
+                  <a:srgbClr val="1F4E79"/>
+                </a:solidFill>
+              </a:defRPr>
+            </a:pPr>
+            <a:r>
+              <a:t>Genre-Specific Impact: Where Filtering Matters Most</a:t>
+            </a:r>
+          </a:p>
+        </p:txBody>
+      </p:sp>
+      <p:pic>
+        <p:nvPicPr>
+          <p:cNvPr id="3" name="Picture 2" descr="viz_stat_4_genre_improvements.png"/>
+          <p:cNvPicPr>
+            <a:picLocks noChangeAspect="1"/>
+          </p:cNvPicPr>
+          <p:nvPr/>
+        </p:nvPicPr>
+        <p:blipFill>
+          <a:blip r:embed="rId2"/>
+          <a:stretch>
+            <a:fillRect/>
+          </a:stretch>
+        </p:blipFill>
+        <p:spPr>
+          <a:xfrm>
+            <a:off x="457200" y="914400"/>
+            <a:ext cx="8229600" cy="4776395"/>
+          </a:xfrm>
+          <a:prstGeom prst="rect">
+            <a:avLst/>
+          </a:prstGeom>
+        </p:spPr>
+      </p:pic>
+    </p:spTree>
+  </p:cSld>
+  <p:clrMapOvr>
+    <a:masterClrMapping/>
+  </p:clrMapOvr>
+</p:sld>
+</file>
+
+<file path=ppt/slides/slide21.xml><?xml version="1.0" encoding="utf-8"?>
+<p:sld xmlns:a="http://schemas.openxmlformats.org/drawingml/2006/main" xmlns:p="http://schemas.openxmlformats.org/presentationml/2006/main" xmlns:r="http://schemas.openxmlformats.org/officeDocument/2006/relationships">
+  <p:cSld>
+    <p:spTree>
+      <p:nvGrpSpPr>
+        <p:cNvPr id="1" name=""/>
+        <p:cNvGrpSpPr/>
+        <p:nvPr/>
+      </p:nvGrpSpPr>
+      <p:grpSpPr/>
+      <p:sp>
+        <p:nvSpPr>
+          <p:cNvPr id="2" name="TextBox 1"/>
+          <p:cNvSpPr txBox="1"/>
+          <p:nvPr/>
+        </p:nvSpPr>
+        <p:spPr>
+          <a:xfrm>
+            <a:off x="457200" y="274320"/>
+            <a:ext cx="8229600" cy="548640"/>
+          </a:xfrm>
+          <a:prstGeom prst="rect">
+            <a:avLst/>
+          </a:prstGeom>
+          <a:noFill/>
+        </p:spPr>
+        <p:txBody>
+          <a:bodyPr wrap="none">
+            <a:spAutoFit/>
+          </a:bodyPr>
+          <a:lstStyle/>
+          <a:p>
+            <a:pPr>
+              <a:defRPr sz="3200" b="1">
+                <a:solidFill>
+                  <a:srgbClr val="1F4E79"/>
+                </a:solidFill>
+              </a:defRPr>
+            </a:pPr>
+            <a:r>
+              <a:t>Investment Confidence Matrix: Decision Readiness</a:t>
+            </a:r>
+          </a:p>
+        </p:txBody>
+      </p:sp>
+      <p:pic>
+        <p:nvPicPr>
+          <p:cNvPr id="3" name="Picture 2" descr="viz_stat_5_investment_confidence.png"/>
+          <p:cNvPicPr>
+            <a:picLocks noChangeAspect="1"/>
+          </p:cNvPicPr>
+          <p:nvPr/>
+        </p:nvPicPr>
+        <p:blipFill>
+          <a:blip r:embed="rId2"/>
+          <a:stretch>
+            <a:fillRect/>
+          </a:stretch>
+        </p:blipFill>
+        <p:spPr>
+          <a:xfrm>
+            <a:off x="457200" y="914400"/>
+            <a:ext cx="8229600" cy="5476416"/>
+          </a:xfrm>
+          <a:prstGeom prst="rect">
+            <a:avLst/>
+          </a:prstGeom>
+        </p:spPr>
+      </p:pic>
+    </p:spTree>
+  </p:cSld>
+  <p:clrMapOvr>
+    <a:masterClrMapping/>
+  </p:clrMapOvr>
+</p:sld>
+</file>
+
+<file path=ppt/slides/slide22.xml><?xml version="1.0" encoding="utf-8"?>
+<p:sld xmlns:a="http://schemas.openxmlformats.org/drawingml/2006/main" xmlns:p="http://schemas.openxmlformats.org/presentationml/2006/main" xmlns:r="http://schemas.openxmlformats.org/officeDocument/2006/relationships">
+  <p:cSld>
+    <p:spTree>
+      <p:nvGrpSpPr>
+        <p:cNvPr id="1" name=""/>
+        <p:cNvGrpSpPr/>
+        <p:nvPr/>
+      </p:nvGrpSpPr>
+      <p:grpSpPr/>
+      <p:sp>
+        <p:nvSpPr>
+          <p:cNvPr id="2" name="TextBox 1"/>
+          <p:cNvSpPr txBox="1"/>
+          <p:nvPr/>
+        </p:nvSpPr>
+        <p:spPr>
+          <a:xfrm>
+            <a:off x="457200" y="274320"/>
+            <a:ext cx="8229600" cy="548640"/>
+          </a:xfrm>
+          <a:prstGeom prst="rect">
+            <a:avLst/>
+          </a:prstGeom>
+          <a:noFill/>
+        </p:spPr>
+        <p:txBody>
+          <a:bodyPr wrap="none">
+            <a:spAutoFit/>
+          </a:bodyPr>
+          <a:lstStyle/>
+          <a:p>
+            <a:pPr>
+              <a:defRPr sz="3200" b="1">
+                <a:solidFill>
+                  <a:srgbClr val="1F4E79"/>
+                </a:solidFill>
+              </a:defRPr>
+            </a:pPr>
+            <a:r>
+              <a:t>Data Flow: From 12M Records to 78K Investment-Grade Dataset</a:t>
+            </a:r>
+          </a:p>
+        </p:txBody>
+      </p:sp>
+      <p:pic>
+        <p:nvPicPr>
+          <p:cNvPr id="3" name="Picture 2" descr="viz_stat_6_pipeline_flow.png"/>
+          <p:cNvPicPr>
+            <a:picLocks noChangeAspect="1"/>
+          </p:cNvPicPr>
+          <p:nvPr/>
+        </p:nvPicPr>
+        <p:blipFill>
+          <a:blip r:embed="rId2"/>
+          <a:stretch>
+            <a:fillRect/>
+          </a:stretch>
+        </p:blipFill>
+        <p:spPr>
+          <a:xfrm>
+            <a:off x="457200" y="914400"/>
+            <a:ext cx="8229600" cy="5053412"/>
+          </a:xfrm>
+          <a:prstGeom prst="rect">
+            <a:avLst/>
+          </a:prstGeom>
+        </p:spPr>
+      </p:pic>
+    </p:spTree>
+  </p:cSld>
+  <p:clrMapOvr>
+    <a:masterClrMapping/>
+  </p:clrMapOvr>
+</p:sld>
+</file>
+
+<file path=ppt/slides/slide23.xml><?xml version="1.0" encoding="utf-8"?>
+<p:sld xmlns:a="http://schemas.openxmlformats.org/drawingml/2006/main" xmlns:p="http://schemas.openxmlformats.org/presentationml/2006/main" xmlns:r="http://schemas.openxmlformats.org/officeDocument/2006/relationships">
+  <p:cSld>
+    <p:spTree>
+      <p:nvGrpSpPr>
+        <p:cNvPr id="1" name=""/>
+        <p:cNvGrpSpPr/>
+        <p:nvPr/>
+      </p:nvGrpSpPr>
+      <p:grpSpPr/>
+      <p:sp>
+        <p:nvSpPr>
+          <p:cNvPr id="2" name="TextBox 1"/>
+          <p:cNvSpPr txBox="1"/>
+          <p:nvPr/>
+        </p:nvSpPr>
+        <p:spPr>
+          <a:xfrm>
+            <a:off x="457200" y="365760"/>
+            <a:ext cx="8229600" cy="731520"/>
+          </a:xfrm>
+          <a:prstGeom prst="rect">
+            <a:avLst/>
+          </a:prstGeom>
+          <a:noFill/>
+        </p:spPr>
+        <p:txBody>
+          <a:bodyPr wrap="none">
+            <a:spAutoFit/>
+          </a:bodyPr>
+          <a:lstStyle/>
+          <a:p>
+            <a:pPr>
+              <a:defRPr sz="3600" b="1">
+                <a:solidFill>
+                  <a:srgbClr val="C00000"/>
+                </a:solidFill>
+              </a:defRPr>
+            </a:pPr>
+            <a:r>
+              <a:t>Hypothesis Testing: Statistical Validation</a:t>
+            </a:r>
+          </a:p>
+        </p:txBody>
+      </p:sp>
+      <p:sp>
+        <p:nvSpPr>
+          <p:cNvPr id="3" name="TextBox 2"/>
+          <p:cNvSpPr txBox="1"/>
+          <p:nvPr/>
+        </p:nvSpPr>
+        <p:spPr>
+          <a:xfrm>
+            <a:off x="640080" y="1280160"/>
+            <a:ext cx="7863840" cy="4572000"/>
+          </a:xfrm>
+          <a:prstGeom prst="rect">
+            <a:avLst/>
+          </a:prstGeom>
+          <a:noFill/>
+        </p:spPr>
+        <p:txBody>
+          <a:bodyPr wrap="square">
+            <a:spAutoFit/>
+          </a:bodyPr>
+          <a:lstStyle/>
+          <a:p>
+            <a:pPr>
+              <a:spcBef>
+                <a:spcPts val="300"/>
+              </a:spcBef>
+              <a:spcAft>
+                <a:spcPts val="300"/>
+              </a:spcAft>
+              <a:defRPr b="1" sz="1800">
+                <a:solidFill>
+                  <a:srgbClr val="006400"/>
+                </a:solidFill>
+              </a:defRPr>
+            </a:pPr>
+            <a:r>
+              <a:t>Research Question:</a:t>
+            </a:r>
+          </a:p>
+          <a:p>
+            <a:pPr>
+              <a:spcBef>
+                <a:spcPts val="300"/>
+              </a:spcBef>
+              <a:spcAft>
+                <a:spcPts val="300"/>
+              </a:spcAft>
+              <a:defRPr sz="1500"/>
+            </a:pPr>
+            <a:r>
+              <a:t>Can we use ONE model for all genres, or different strategies needed?</a:t>
+            </a:r>
+          </a:p>
+          <a:p>
+            <a:pPr>
+              <a:spcBef>
+                <a:spcPts val="300"/>
+              </a:spcBef>
+              <a:spcAft>
+                <a:spcPts val="300"/>
+              </a:spcAft>
+              <a:defRPr sz="1500"/>
+            </a:pPr>
+          </a:p>
+          <a:p>
+            <a:pPr>
+              <a:spcBef>
+                <a:spcPts val="300"/>
+              </a:spcBef>
+              <a:spcAft>
+                <a:spcPts val="300"/>
+              </a:spcAft>
+              <a:defRPr b="1" sz="1800">
+                <a:solidFill>
+                  <a:srgbClr val="006400"/>
+                </a:solidFill>
+              </a:defRPr>
+            </a:pPr>
+            <a:r>
+              <a:t>Statistical Test: Fisher Z-Transformation</a:t>
+            </a:r>
+          </a:p>
+          <a:p>
+            <a:pPr>
+              <a:spcBef>
+                <a:spcPts val="300"/>
+              </a:spcBef>
+              <a:spcAft>
+                <a:spcPts val="300"/>
+              </a:spcAft>
+              <a:defRPr sz="1500"/>
+            </a:pPr>
+            <a:r>
+              <a:t>  H0: All genres follow same runtime-rating pattern</a:t>
+            </a:r>
+          </a:p>
+          <a:p>
+            <a:pPr>
+              <a:spcBef>
+                <a:spcPts val="300"/>
+              </a:spcBef>
+              <a:spcAft>
+                <a:spcPts val="300"/>
+              </a:spcAft>
+              <a:defRPr sz="1500"/>
+            </a:pPr>
+            <a:r>
+              <a:t>  Ha: Different genres follow different patterns</a:t>
+            </a:r>
+          </a:p>
+          <a:p>
+            <a:pPr>
+              <a:spcBef>
+                <a:spcPts val="300"/>
+              </a:spcBef>
+              <a:spcAft>
+                <a:spcPts val="300"/>
+              </a:spcAft>
+              <a:defRPr sz="1500"/>
+            </a:pPr>
+          </a:p>
+          <a:p>
+            <a:pPr>
+              <a:spcBef>
+                <a:spcPts val="300"/>
+              </a:spcBef>
+              <a:spcAft>
+                <a:spcPts val="300"/>
+              </a:spcAft>
+              <a:defRPr b="1" sz="1800">
+                <a:solidFill>
+                  <a:srgbClr val="006400"/>
+                </a:solidFill>
+              </a:defRPr>
+            </a:pPr>
+            <a:r>
+              <a:t>Result: REJECT H0 (p &lt; 0.05)</a:t>
+            </a:r>
+          </a:p>
+          <a:p>
+            <a:pPr>
+              <a:spcBef>
+                <a:spcPts val="300"/>
+              </a:spcBef>
+              <a:spcAft>
+                <a:spcPts val="300"/>
+              </a:spcAft>
+              <a:defRPr sz="1500"/>
+            </a:pPr>
+            <a:r>
+              <a:t>  Documentary vs Action: Z=2.14, p=0.032 [SIGNIFICANT]</a:t>
+            </a:r>
+          </a:p>
+          <a:p>
+            <a:pPr>
+              <a:spcBef>
+                <a:spcPts val="300"/>
+              </a:spcBef>
+              <a:spcAft>
+                <a:spcPts val="300"/>
+              </a:spcAft>
+              <a:defRPr sz="1500"/>
+            </a:pPr>
+            <a:r>
+              <a:t>  Conclusion: Genre segmentation is statistically required</a:t>
+            </a:r>
+          </a:p>
+        </p:txBody>
+      </p:sp>
+    </p:spTree>
+  </p:cSld>
+  <p:clrMapOvr>
+    <a:masterClrMapping/>
+  </p:clrMapOvr>
+</p:sld>
+</file>
+
+<file path=ppt/slides/slide24.xml><?xml version="1.0" encoding="utf-8"?>
+<p:sld xmlns:a="http://schemas.openxmlformats.org/drawingml/2006/main" xmlns:p="http://schemas.openxmlformats.org/presentationml/2006/main" xmlns:r="http://schemas.openxmlformats.org/officeDocument/2006/relationships">
+  <p:cSld>
+    <p:spTree>
+      <p:nvGrpSpPr>
+        <p:cNvPr id="1" name=""/>
+        <p:cNvGrpSpPr/>
+        <p:nvPr/>
+      </p:nvGrpSpPr>
+      <p:grpSpPr/>
+      <p:sp>
+        <p:nvSpPr>
+          <p:cNvPr id="2" name="TextBox 1"/>
+          <p:cNvSpPr txBox="1"/>
+          <p:nvPr/>
+        </p:nvSpPr>
+        <p:spPr>
+          <a:xfrm>
+            <a:off x="457200" y="274320"/>
+            <a:ext cx="8229600" cy="548640"/>
+          </a:xfrm>
+          <a:prstGeom prst="rect">
+            <a:avLst/>
+          </a:prstGeom>
+          <a:noFill/>
+        </p:spPr>
+        <p:txBody>
+          <a:bodyPr wrap="none">
+            <a:spAutoFit/>
+          </a:bodyPr>
+          <a:lstStyle/>
+          <a:p>
+            <a:pPr>
+              <a:defRPr sz="3100" b="1">
+                <a:solidFill>
+                  <a:srgbClr val="C00000"/>
+                </a:solidFill>
+              </a:defRPr>
+            </a:pPr>
+            <a:r>
+              <a:t>Genre-Specific Regression Patterns</a:t>
+            </a:r>
+          </a:p>
+        </p:txBody>
+      </p:sp>
+      <p:pic>
+        <p:nvPicPr>
+          <p:cNvPr id="3" name="Picture 2" descr="viz_hyp_1_genre_regressions.png"/>
+          <p:cNvPicPr>
+            <a:picLocks noChangeAspect="1"/>
+          </p:cNvPicPr>
+          <p:nvPr/>
+        </p:nvPicPr>
+        <p:blipFill>
+          <a:blip r:embed="rId2"/>
+          <a:stretch>
+            <a:fillRect/>
+          </a:stretch>
+        </p:blipFill>
+        <p:spPr>
+          <a:xfrm>
+            <a:off x="457200" y="914400"/>
+            <a:ext cx="8229600" cy="4600112"/>
+          </a:xfrm>
+          <a:prstGeom prst="rect">
+            <a:avLst/>
+          </a:prstGeom>
+        </p:spPr>
+      </p:pic>
+    </p:spTree>
+  </p:cSld>
+  <p:clrMapOvr>
+    <a:masterClrMapping/>
+  </p:clrMapOvr>
+</p:sld>
+</file>
+
+<file path=ppt/slides/slide25.xml><?xml version="1.0" encoding="utf-8"?>
+<p:sld xmlns:a="http://schemas.openxmlformats.org/drawingml/2006/main" xmlns:p="http://schemas.openxmlformats.org/presentationml/2006/main" xmlns:r="http://schemas.openxmlformats.org/officeDocument/2006/relationships">
+  <p:cSld>
+    <p:spTree>
+      <p:nvGrpSpPr>
+        <p:cNvPr id="1" name=""/>
+        <p:cNvGrpSpPr/>
+        <p:nvPr/>
+      </p:nvGrpSpPr>
+      <p:grpSpPr/>
+      <p:sp>
+        <p:nvSpPr>
+          <p:cNvPr id="2" name="TextBox 1"/>
+          <p:cNvSpPr txBox="1"/>
+          <p:nvPr/>
+        </p:nvSpPr>
+        <p:spPr>
+          <a:xfrm>
+            <a:off x="457200" y="274320"/>
+            <a:ext cx="8229600" cy="548640"/>
+          </a:xfrm>
+          <a:prstGeom prst="rect">
+            <a:avLst/>
+          </a:prstGeom>
+          <a:noFill/>
+        </p:spPr>
+        <p:txBody>
+          <a:bodyPr wrap="none">
+            <a:spAutoFit/>
+          </a:bodyPr>
+          <a:lstStyle/>
+          <a:p>
+            <a:pPr>
+              <a:defRPr sz="3100" b="1">
+                <a:solidFill>
+                  <a:srgbClr val="C00000"/>
+                </a:solidFill>
+              </a:defRPr>
+            </a:pPr>
+            <a:r>
+              <a:t>Correlation Analysis by Genre</a:t>
+            </a:r>
+          </a:p>
+        </p:txBody>
+      </p:sp>
+      <p:pic>
+        <p:nvPicPr>
+          <p:cNvPr id="3" name="Picture 2" descr="viz_hyp_2_correlation_heatmap.png"/>
+          <p:cNvPicPr>
+            <a:picLocks noChangeAspect="1"/>
+          </p:cNvPicPr>
+          <p:nvPr/>
+        </p:nvPicPr>
+        <p:blipFill>
+          <a:blip r:embed="rId2"/>
+          <a:stretch>
+            <a:fillRect/>
+          </a:stretch>
+        </p:blipFill>
+        <p:spPr>
+          <a:xfrm>
+            <a:off x="457200" y="914400"/>
+            <a:ext cx="8229600" cy="5858203"/>
+          </a:xfrm>
+          <a:prstGeom prst="rect">
+            <a:avLst/>
+          </a:prstGeom>
+        </p:spPr>
+      </p:pic>
+    </p:spTree>
+  </p:cSld>
+  <p:clrMapOvr>
+    <a:masterClrMapping/>
+  </p:clrMapOvr>
+</p:sld>
+</file>
+
+<file path=ppt/slides/slide26.xml><?xml version="1.0" encoding="utf-8"?>
+<p:sld xmlns:a="http://schemas.openxmlformats.org/drawingml/2006/main" xmlns:p="http://schemas.openxmlformats.org/presentationml/2006/main" xmlns:r="http://schemas.openxmlformats.org/officeDocument/2006/relationships">
+  <p:cSld>
+    <p:spTree>
+      <p:nvGrpSpPr>
+        <p:cNvPr id="1" name=""/>
+        <p:cNvGrpSpPr/>
+        <p:nvPr/>
+      </p:nvGrpSpPr>
+      <p:grpSpPr/>
+      <p:sp>
+        <p:nvSpPr>
+          <p:cNvPr id="2" name="TextBox 1"/>
+          <p:cNvSpPr txBox="1"/>
+          <p:nvPr/>
+        </p:nvSpPr>
+        <p:spPr>
+          <a:xfrm>
+            <a:off x="457200" y="274320"/>
+            <a:ext cx="8229600" cy="548640"/>
+          </a:xfrm>
+          <a:prstGeom prst="rect">
+            <a:avLst/>
+          </a:prstGeom>
+          <a:noFill/>
+        </p:spPr>
+        <p:txBody>
+          <a:bodyPr wrap="none">
+            <a:spAutoFit/>
+          </a:bodyPr>
+          <a:lstStyle/>
+          <a:p>
+            <a:pPr>
+              <a:defRPr sz="3100" b="1">
+                <a:solidFill>
+                  <a:srgbClr val="C00000"/>
+                </a:solidFill>
+              </a:defRPr>
+            </a:pPr>
+            <a:r>
+              <a:t>Statistical Power: Sample Size Analysis</a:t>
+            </a:r>
+          </a:p>
+        </p:txBody>
+      </p:sp>
+      <p:pic>
+        <p:nvPicPr>
+          <p:cNvPr id="3" name="Picture 2" descr="viz_hyp_3_statistical_power.png"/>
+          <p:cNvPicPr>
+            <a:picLocks noChangeAspect="1"/>
+          </p:cNvPicPr>
+          <p:nvPr/>
+        </p:nvPicPr>
+        <p:blipFill>
+          <a:blip r:embed="rId2"/>
+          <a:stretch>
+            <a:fillRect/>
+          </a:stretch>
+        </p:blipFill>
+        <p:spPr>
+          <a:xfrm>
+            <a:off x="457200" y="914400"/>
+            <a:ext cx="8229600" cy="3484802"/>
+          </a:xfrm>
+          <a:prstGeom prst="rect">
+            <a:avLst/>
+          </a:prstGeom>
+        </p:spPr>
+      </p:pic>
+    </p:spTree>
+  </p:cSld>
+  <p:clrMapOvr>
+    <a:masterClrMapping/>
+  </p:clrMapOvr>
+</p:sld>
+</file>
+
+<file path=ppt/slides/slide27.xml><?xml version="1.0" encoding="utf-8"?>
+<p:sld xmlns:a="http://schemas.openxmlformats.org/drawingml/2006/main" xmlns:p="http://schemas.openxmlformats.org/presentationml/2006/main" xmlns:r="http://schemas.openxmlformats.org/officeDocument/2006/relationships">
+  <p:cSld>
+    <p:spTree>
+      <p:nvGrpSpPr>
+        <p:cNvPr id="1" name=""/>
+        <p:cNvGrpSpPr/>
+        <p:nvPr/>
+      </p:nvGrpSpPr>
+      <p:grpSpPr/>
+      <p:sp>
+        <p:nvSpPr>
+          <p:cNvPr id="2" name="TextBox 1"/>
+          <p:cNvSpPr txBox="1"/>
+          <p:nvPr/>
+        </p:nvSpPr>
+        <p:spPr>
+          <a:xfrm>
+            <a:off x="457200" y="274320"/>
+            <a:ext cx="8229600" cy="548640"/>
+          </a:xfrm>
+          <a:prstGeom prst="rect">
+            <a:avLst/>
+          </a:prstGeom>
+          <a:noFill/>
+        </p:spPr>
+        <p:txBody>
+          <a:bodyPr wrap="none">
+            <a:spAutoFit/>
+          </a:bodyPr>
+          <a:lstStyle/>
+          <a:p>
+            <a:pPr>
+              <a:defRPr sz="3100" b="1">
+                <a:solidFill>
+                  <a:srgbClr val="C00000"/>
+                </a:solidFill>
+              </a:defRPr>
+            </a:pPr>
+            <a:r>
+              <a:t>Hypothesis Test Results: Significance Levels</a:t>
+            </a:r>
+          </a:p>
+        </p:txBody>
+      </p:sp>
+      <p:pic>
+        <p:nvPicPr>
+          <p:cNvPr id="3" name="Picture 2" descr="viz_hyp_4_test_summary.png"/>
+          <p:cNvPicPr>
+            <a:picLocks noChangeAspect="1"/>
+          </p:cNvPicPr>
+          <p:nvPr/>
+        </p:nvPicPr>
+        <p:blipFill>
+          <a:blip r:embed="rId2"/>
+          <a:stretch>
+            <a:fillRect/>
+          </a:stretch>
+        </p:blipFill>
+        <p:spPr>
+          <a:xfrm>
+            <a:off x="457200" y="914400"/>
+            <a:ext cx="8229600" cy="5044361"/>
+          </a:xfrm>
+          <a:prstGeom prst="rect">
+            <a:avLst/>
+          </a:prstGeom>
+        </p:spPr>
+      </p:pic>
+    </p:spTree>
+  </p:cSld>
+  <p:clrMapOvr>
+    <a:masterClrMapping/>
+  </p:clrMapOvr>
+</p:sld>
+</file>
+
+<file path=ppt/slides/slide28.xml><?xml version="1.0" encoding="utf-8"?>
+<p:sld xmlns:a="http://schemas.openxmlformats.org/drawingml/2006/main" xmlns:p="http://schemas.openxmlformats.org/presentationml/2006/main" xmlns:r="http://schemas.openxmlformats.org/officeDocument/2006/relationships">
+  <p:cSld>
+    <p:spTree>
+      <p:nvGrpSpPr>
+        <p:cNvPr id="1" name=""/>
+        <p:cNvGrpSpPr/>
+        <p:nvPr/>
+      </p:nvGrpSpPr>
+      <p:grpSpPr/>
+      <p:sp>
+        <p:nvSpPr>
+          <p:cNvPr id="2" name="TextBox 1"/>
+          <p:cNvSpPr txBox="1"/>
+          <p:nvPr/>
+        </p:nvSpPr>
+        <p:spPr>
+          <a:xfrm>
+            <a:off x="457200" y="274320"/>
+            <a:ext cx="8229600" cy="548640"/>
+          </a:xfrm>
+          <a:prstGeom prst="rect">
+            <a:avLst/>
+          </a:prstGeom>
+          <a:noFill/>
+        </p:spPr>
+        <p:txBody>
+          <a:bodyPr wrap="none">
+            <a:spAutoFit/>
+          </a:bodyPr>
+          <a:lstStyle/>
+          <a:p>
+            <a:pPr>
+              <a:defRPr sz="3100" b="1">
+                <a:solidFill>
+                  <a:srgbClr val="C00000"/>
+                </a:solidFill>
+              </a:defRPr>
+            </a:pPr>
+            <a:r>
+              <a:t>Investment Strategy Matrix Based on Statistics</a:t>
+            </a:r>
+          </a:p>
+        </p:txBody>
+      </p:sp>
+      <p:pic>
+        <p:nvPicPr>
+          <p:cNvPr id="3" name="Picture 2" descr="viz_hyp_5_investment_strategy.png"/>
+          <p:cNvPicPr>
+            <a:picLocks noChangeAspect="1"/>
+          </p:cNvPicPr>
+          <p:nvPr/>
+        </p:nvPicPr>
+        <p:blipFill>
+          <a:blip r:embed="rId2"/>
+          <a:stretch>
+            <a:fillRect/>
+          </a:stretch>
+        </p:blipFill>
+        <p:spPr>
+          <a:xfrm>
+            <a:off x="457200" y="914400"/>
+            <a:ext cx="8229600" cy="5090519"/>
+          </a:xfrm>
+          <a:prstGeom prst="rect">
+            <a:avLst/>
+          </a:prstGeom>
+        </p:spPr>
+      </p:pic>
+    </p:spTree>
+  </p:cSld>
+  <p:clrMapOvr>
+    <a:masterClrMapping/>
+  </p:clrMapOvr>
+</p:sld>
+</file>
+
+<file path=ppt/slides/slide29.xml><?xml version="1.0" encoding="utf-8"?>
+<p:sld xmlns:a="http://schemas.openxmlformats.org/drawingml/2006/main" xmlns:p="http://schemas.openxmlformats.org/presentationml/2006/main" xmlns:r="http://schemas.openxmlformats.org/officeDocument/2006/relationships">
+  <p:cSld>
+    <p:spTree>
+      <p:nvGrpSpPr>
+        <p:cNvPr id="1" name=""/>
+        <p:cNvGrpSpPr/>
+        <p:nvPr/>
+      </p:nvGrpSpPr>
+      <p:grpSpPr/>
+      <p:sp>
+        <p:nvSpPr>
+          <p:cNvPr id="2" name="TextBox 1"/>
+          <p:cNvSpPr txBox="1"/>
+          <p:nvPr/>
+        </p:nvSpPr>
+        <p:spPr>
+          <a:xfrm>
+            <a:off x="457200" y="274320"/>
+            <a:ext cx="8229600" cy="548640"/>
+          </a:xfrm>
+          <a:prstGeom prst="rect">
+            <a:avLst/>
+          </a:prstGeom>
+          <a:noFill/>
+        </p:spPr>
+        <p:txBody>
+          <a:bodyPr wrap="none">
+            <a:spAutoFit/>
+          </a:bodyPr>
+          <a:lstStyle/>
+          <a:p>
+            <a:pPr>
+              <a:defRPr sz="3200" b="1">
+                <a:solidFill>
+                  <a:srgbClr val="1F4E79"/>
+                </a:solidFill>
+              </a:defRPr>
+            </a:pPr>
+            <a:r>
+              <a:t>Top-Rated Movies: Impact of 500+ Filter</a:t>
+            </a:r>
+          </a:p>
+        </p:txBody>
+      </p:sp>
+      <p:pic>
+        <p:nvPicPr>
+          <p:cNvPr id="3" name="Picture 2" descr="viz_1_top_rated_filtered_500.png"/>
+          <p:cNvPicPr>
+            <a:picLocks noChangeAspect="1"/>
+          </p:cNvPicPr>
+          <p:nvPr/>
+        </p:nvPicPr>
+        <p:blipFill>
+          <a:blip r:embed="rId2"/>
+          <a:stretch>
+            <a:fillRect/>
+          </a:stretch>
+        </p:blipFill>
+        <p:spPr>
+          <a:xfrm>
+            <a:off x="457200" y="914400"/>
+            <a:ext cx="8229600" cy="4085334"/>
+          </a:xfrm>
+          <a:prstGeom prst="rect">
+            <a:avLst/>
+          </a:prstGeom>
+        </p:spPr>
+      </p:pic>
     </p:spTree>
   </p:cSld>
   <p:clrMapOvr>
@@ -4708,6 +6087,746 @@
             </a:pPr>
             <a:r>
               <a:t>✅ Opportunity: Increase film profitability by 15-20% in 3 years</a:t>
+            </a:r>
+          </a:p>
+        </p:txBody>
+      </p:sp>
+    </p:spTree>
+  </p:cSld>
+  <p:clrMapOvr>
+    <a:masterClrMapping/>
+  </p:clrMapOvr>
+</p:sld>
+</file>
+
+<file path=ppt/slides/slide30.xml><?xml version="1.0" encoding="utf-8"?>
+<p:sld xmlns:a="http://schemas.openxmlformats.org/drawingml/2006/main" xmlns:p="http://schemas.openxmlformats.org/presentationml/2006/main" xmlns:r="http://schemas.openxmlformats.org/officeDocument/2006/relationships">
+  <p:cSld>
+    <p:spTree>
+      <p:nvGrpSpPr>
+        <p:cNvPr id="1" name=""/>
+        <p:cNvGrpSpPr/>
+        <p:nvPr/>
+      </p:nvGrpSpPr>
+      <p:grpSpPr/>
+      <p:sp>
+        <p:nvSpPr>
+          <p:cNvPr id="2" name="TextBox 1"/>
+          <p:cNvSpPr txBox="1"/>
+          <p:nvPr/>
+        </p:nvSpPr>
+        <p:spPr>
+          <a:xfrm>
+            <a:off x="457200" y="274320"/>
+            <a:ext cx="8229600" cy="548640"/>
+          </a:xfrm>
+          <a:prstGeom prst="rect">
+            <a:avLst/>
+          </a:prstGeom>
+          <a:noFill/>
+        </p:spPr>
+        <p:txBody>
+          <a:bodyPr wrap="none">
+            <a:spAutoFit/>
+          </a:bodyPr>
+          <a:lstStyle/>
+          <a:p>
+            <a:pPr>
+              <a:defRPr sz="3200" b="1">
+                <a:solidFill>
+                  <a:srgbClr val="1F4E79"/>
+                </a:solidFill>
+              </a:defRPr>
+            </a:pPr>
+            <a:r>
+              <a:t>Production Trends Over Time</a:t>
+            </a:r>
+          </a:p>
+        </p:txBody>
+      </p:sp>
+      <p:pic>
+        <p:nvPicPr>
+          <p:cNvPr id="3" name="Picture 2" descr="viz_2_trends_filtered_500.png"/>
+          <p:cNvPicPr>
+            <a:picLocks noChangeAspect="1"/>
+          </p:cNvPicPr>
+          <p:nvPr/>
+        </p:nvPicPr>
+        <p:blipFill>
+          <a:blip r:embed="rId2"/>
+          <a:stretch>
+            <a:fillRect/>
+          </a:stretch>
+        </p:blipFill>
+        <p:spPr>
+          <a:xfrm>
+            <a:off x="457200" y="914400"/>
+            <a:ext cx="8229600" cy="5117523"/>
+          </a:xfrm>
+          <a:prstGeom prst="rect">
+            <a:avLst/>
+          </a:prstGeom>
+        </p:spPr>
+      </p:pic>
+    </p:spTree>
+  </p:cSld>
+  <p:clrMapOvr>
+    <a:masterClrMapping/>
+  </p:clrMapOvr>
+</p:sld>
+</file>
+
+<file path=ppt/slides/slide31.xml><?xml version="1.0" encoding="utf-8"?>
+<p:sld xmlns:a="http://schemas.openxmlformats.org/drawingml/2006/main" xmlns:p="http://schemas.openxmlformats.org/presentationml/2006/main" xmlns:r="http://schemas.openxmlformats.org/officeDocument/2006/relationships">
+  <p:cSld>
+    <p:spTree>
+      <p:nvGrpSpPr>
+        <p:cNvPr id="1" name=""/>
+        <p:cNvGrpSpPr/>
+        <p:nvPr/>
+      </p:nvGrpSpPr>
+      <p:grpSpPr/>
+      <p:sp>
+        <p:nvSpPr>
+          <p:cNvPr id="2" name="TextBox 1"/>
+          <p:cNvSpPr txBox="1"/>
+          <p:nvPr/>
+        </p:nvSpPr>
+        <p:spPr>
+          <a:xfrm>
+            <a:off x="457200" y="274320"/>
+            <a:ext cx="8229600" cy="548640"/>
+          </a:xfrm>
+          <a:prstGeom prst="rect">
+            <a:avLst/>
+          </a:prstGeom>
+          <a:noFill/>
+        </p:spPr>
+        <p:txBody>
+          <a:bodyPr wrap="none">
+            <a:spAutoFit/>
+          </a:bodyPr>
+          <a:lstStyle/>
+          <a:p>
+            <a:pPr>
+              <a:defRPr sz="3200" b="1">
+                <a:solidFill>
+                  <a:srgbClr val="1F4E79"/>
+                </a:solidFill>
+              </a:defRPr>
+            </a:pPr>
+            <a:r>
+              <a:t>Top 10 Genres Comparison</a:t>
+            </a:r>
+          </a:p>
+        </p:txBody>
+      </p:sp>
+      <p:pic>
+        <p:nvPicPr>
+          <p:cNvPr id="3" name="Picture 2" descr="viz_3_genres_filtered_500.png"/>
+          <p:cNvPicPr>
+            <a:picLocks noChangeAspect="1"/>
+          </p:cNvPicPr>
+          <p:nvPr/>
+        </p:nvPicPr>
+        <p:blipFill>
+          <a:blip r:embed="rId2"/>
+          <a:stretch>
+            <a:fillRect/>
+          </a:stretch>
+        </p:blipFill>
+        <p:spPr>
+          <a:xfrm>
+            <a:off x="457200" y="914400"/>
+            <a:ext cx="8229600" cy="4079290"/>
+          </a:xfrm>
+          <a:prstGeom prst="rect">
+            <a:avLst/>
+          </a:prstGeom>
+        </p:spPr>
+      </p:pic>
+    </p:spTree>
+  </p:cSld>
+  <p:clrMapOvr>
+    <a:masterClrMapping/>
+  </p:clrMapOvr>
+</p:sld>
+</file>
+
+<file path=ppt/slides/slide32.xml><?xml version="1.0" encoding="utf-8"?>
+<p:sld xmlns:a="http://schemas.openxmlformats.org/drawingml/2006/main" xmlns:p="http://schemas.openxmlformats.org/presentationml/2006/main" xmlns:r="http://schemas.openxmlformats.org/officeDocument/2006/relationships">
+  <p:cSld>
+    <p:spTree>
+      <p:nvGrpSpPr>
+        <p:cNvPr id="1" name=""/>
+        <p:cNvGrpSpPr/>
+        <p:nvPr/>
+      </p:nvGrpSpPr>
+      <p:grpSpPr/>
+      <p:sp>
+        <p:nvSpPr>
+          <p:cNvPr id="2" name="TextBox 1"/>
+          <p:cNvSpPr txBox="1"/>
+          <p:nvPr/>
+        </p:nvSpPr>
+        <p:spPr>
+          <a:xfrm>
+            <a:off x="457200" y="274320"/>
+            <a:ext cx="8229600" cy="548640"/>
+          </a:xfrm>
+          <a:prstGeom prst="rect">
+            <a:avLst/>
+          </a:prstGeom>
+          <a:noFill/>
+        </p:spPr>
+        <p:txBody>
+          <a:bodyPr wrap="none">
+            <a:spAutoFit/>
+          </a:bodyPr>
+          <a:lstStyle/>
+          <a:p>
+            <a:pPr>
+              <a:defRPr sz="3200" b="1">
+                <a:solidFill>
+                  <a:srgbClr val="1F4E79"/>
+                </a:solidFill>
+              </a:defRPr>
+            </a:pPr>
+            <a:r>
+              <a:t>Runtime vs Rating Analysis</a:t>
+            </a:r>
+          </a:p>
+        </p:txBody>
+      </p:sp>
+      <p:pic>
+        <p:nvPicPr>
+          <p:cNvPr id="3" name="Picture 2" descr="viz_4_runtime_filtered_500.png"/>
+          <p:cNvPicPr>
+            <a:picLocks noChangeAspect="1"/>
+          </p:cNvPicPr>
+          <p:nvPr/>
+        </p:nvPicPr>
+        <p:blipFill>
+          <a:blip r:embed="rId2"/>
+          <a:stretch>
+            <a:fillRect/>
+          </a:stretch>
+        </p:blipFill>
+        <p:spPr>
+          <a:xfrm>
+            <a:off x="457200" y="914400"/>
+            <a:ext cx="8229600" cy="6157050"/>
+          </a:xfrm>
+          <a:prstGeom prst="rect">
+            <a:avLst/>
+          </a:prstGeom>
+        </p:spPr>
+      </p:pic>
+    </p:spTree>
+  </p:cSld>
+  <p:clrMapOvr>
+    <a:masterClrMapping/>
+  </p:clrMapOvr>
+</p:sld>
+</file>
+
+<file path=ppt/slides/slide33.xml><?xml version="1.0" encoding="utf-8"?>
+<p:sld xmlns:a="http://schemas.openxmlformats.org/drawingml/2006/main" xmlns:p="http://schemas.openxmlformats.org/presentationml/2006/main" xmlns:r="http://schemas.openxmlformats.org/officeDocument/2006/relationships">
+  <p:cSld>
+    <p:spTree>
+      <p:nvGrpSpPr>
+        <p:cNvPr id="1" name=""/>
+        <p:cNvGrpSpPr/>
+        <p:nvPr/>
+      </p:nvGrpSpPr>
+      <p:grpSpPr/>
+      <p:sp>
+        <p:nvSpPr>
+          <p:cNvPr id="2" name="TextBox 1"/>
+          <p:cNvSpPr txBox="1"/>
+          <p:nvPr/>
+        </p:nvSpPr>
+        <p:spPr>
+          <a:xfrm>
+            <a:off x="457200" y="274320"/>
+            <a:ext cx="8229600" cy="548640"/>
+          </a:xfrm>
+          <a:prstGeom prst="rect">
+            <a:avLst/>
+          </a:prstGeom>
+          <a:noFill/>
+        </p:spPr>
+        <p:txBody>
+          <a:bodyPr wrap="none">
+            <a:spAutoFit/>
+          </a:bodyPr>
+          <a:lstStyle/>
+          <a:p>
+            <a:pPr>
+              <a:defRPr sz="3200" b="1">
+                <a:solidFill>
+                  <a:srgbClr val="1F4E79"/>
+                </a:solidFill>
+              </a:defRPr>
+            </a:pPr>
+            <a:r>
+              <a:t>Rating Distribution Comparison</a:t>
+            </a:r>
+          </a:p>
+        </p:txBody>
+      </p:sp>
+      <p:pic>
+        <p:nvPicPr>
+          <p:cNvPr id="3" name="Picture 2" descr="viz_5_distribution_filtered_500_900.png"/>
+          <p:cNvPicPr>
+            <a:picLocks noChangeAspect="1"/>
+          </p:cNvPicPr>
+          <p:nvPr/>
+        </p:nvPicPr>
+        <p:blipFill>
+          <a:blip r:embed="rId2"/>
+          <a:stretch>
+            <a:fillRect/>
+          </a:stretch>
+        </p:blipFill>
+        <p:spPr>
+          <a:xfrm>
+            <a:off x="457200" y="914400"/>
+            <a:ext cx="8229600" cy="5116446"/>
+          </a:xfrm>
+          <a:prstGeom prst="rect">
+            <a:avLst/>
+          </a:prstGeom>
+        </p:spPr>
+      </p:pic>
+    </p:spTree>
+  </p:cSld>
+  <p:clrMapOvr>
+    <a:masterClrMapping/>
+  </p:clrMapOvr>
+</p:sld>
+</file>
+
+<file path=ppt/slides/slide34.xml><?xml version="1.0" encoding="utf-8"?>
+<p:sld xmlns:a="http://schemas.openxmlformats.org/drawingml/2006/main" xmlns:p="http://schemas.openxmlformats.org/presentationml/2006/main" xmlns:r="http://schemas.openxmlformats.org/officeDocument/2006/relationships">
+  <p:cSld>
+    <p:spTree>
+      <p:nvGrpSpPr>
+        <p:cNvPr id="1" name=""/>
+        <p:cNvGrpSpPr/>
+        <p:nvPr/>
+      </p:nvGrpSpPr>
+      <p:grpSpPr/>
+      <p:sp>
+        <p:nvSpPr>
+          <p:cNvPr id="2" name="TextBox 1"/>
+          <p:cNvSpPr txBox="1"/>
+          <p:nvPr/>
+        </p:nvSpPr>
+        <p:spPr>
+          <a:xfrm>
+            <a:off x="457200" y="274320"/>
+            <a:ext cx="8229600" cy="548640"/>
+          </a:xfrm>
+          <a:prstGeom prst="rect">
+            <a:avLst/>
+          </a:prstGeom>
+          <a:noFill/>
+        </p:spPr>
+        <p:txBody>
+          <a:bodyPr wrap="none">
+            <a:spAutoFit/>
+          </a:bodyPr>
+          <a:lstStyle/>
+          <a:p>
+            <a:pPr>
+              <a:defRPr sz="3200" b="1">
+                <a:solidFill>
+                  <a:srgbClr val="1F4E79"/>
+                </a:solidFill>
+              </a:defRPr>
+            </a:pPr>
+            <a:r>
+              <a:t>Vote Count vs Rating Thresholds</a:t>
+            </a:r>
+          </a:p>
+        </p:txBody>
+      </p:sp>
+      <p:pic>
+        <p:nvPicPr>
+          <p:cNvPr id="3" name="Picture 2" descr="viz_6_scatter_filtered_500_900.png"/>
+          <p:cNvPicPr>
+            <a:picLocks noChangeAspect="1"/>
+          </p:cNvPicPr>
+          <p:nvPr/>
+        </p:nvPicPr>
+        <p:blipFill>
+          <a:blip r:embed="rId2"/>
+          <a:stretch>
+            <a:fillRect/>
+          </a:stretch>
+        </p:blipFill>
+        <p:spPr>
+          <a:xfrm>
+            <a:off x="457200" y="914400"/>
+            <a:ext cx="8229600" cy="3540823"/>
+          </a:xfrm>
+          <a:prstGeom prst="rect">
+            <a:avLst/>
+          </a:prstGeom>
+        </p:spPr>
+      </p:pic>
+    </p:spTree>
+  </p:cSld>
+  <p:clrMapOvr>
+    <a:masterClrMapping/>
+  </p:clrMapOvr>
+</p:sld>
+</file>
+
+<file path=ppt/slides/slide35.xml><?xml version="1.0" encoding="utf-8"?>
+<p:sld xmlns:a="http://schemas.openxmlformats.org/drawingml/2006/main" xmlns:p="http://schemas.openxmlformats.org/presentationml/2006/main" xmlns:r="http://schemas.openxmlformats.org/officeDocument/2006/relationships">
+  <p:cSld>
+    <p:spTree>
+      <p:nvGrpSpPr>
+        <p:cNvPr id="1" name=""/>
+        <p:cNvGrpSpPr/>
+        <p:nvPr/>
+      </p:nvGrpSpPr>
+      <p:grpSpPr/>
+      <p:sp>
+        <p:nvSpPr>
+          <p:cNvPr id="2" name="TextBox 1"/>
+          <p:cNvSpPr txBox="1"/>
+          <p:nvPr/>
+        </p:nvSpPr>
+        <p:spPr>
+          <a:xfrm>
+            <a:off x="457200" y="365760"/>
+            <a:ext cx="8229600" cy="731520"/>
+          </a:xfrm>
+          <a:prstGeom prst="rect">
+            <a:avLst/>
+          </a:prstGeom>
+          <a:noFill/>
+        </p:spPr>
+        <p:txBody>
+          <a:bodyPr wrap="none">
+            <a:spAutoFit/>
+          </a:bodyPr>
+          <a:lstStyle/>
+          <a:p>
+            <a:pPr>
+              <a:defRPr sz="4000" b="1">
+                <a:solidFill>
+                  <a:srgbClr val="1F4E79"/>
+                </a:solidFill>
+              </a:defRPr>
+            </a:pPr>
+            <a:r>
+              <a:t>Complete Analysis Summary</a:t>
+            </a:r>
+          </a:p>
+        </p:txBody>
+      </p:sp>
+      <p:sp>
+        <p:nvSpPr>
+          <p:cNvPr id="3" name="TextBox 2"/>
+          <p:cNvSpPr txBox="1"/>
+          <p:nvPr/>
+        </p:nvSpPr>
+        <p:spPr>
+          <a:xfrm>
+            <a:off x="365760" y="1188720"/>
+            <a:ext cx="8412480" cy="5029200"/>
+          </a:xfrm>
+          <a:prstGeom prst="rect">
+            <a:avLst/>
+          </a:prstGeom>
+          <a:noFill/>
+        </p:spPr>
+        <p:txBody>
+          <a:bodyPr wrap="square">
+            <a:spAutoFit/>
+          </a:bodyPr>
+          <a:lstStyle/>
+          <a:p>
+            <a:pPr>
+              <a:spcBef>
+                <a:spcPts val="200"/>
+              </a:spcBef>
+              <a:spcAft>
+                <a:spcPts val="200"/>
+              </a:spcAft>
+              <a:defRPr b="1" sz="1800">
+                <a:solidFill>
+                  <a:srgbClr val="006400"/>
+                </a:solidFill>
+              </a:defRPr>
+            </a:pPr>
+            <a:r>
+              <a:t>Data Quality</a:t>
+            </a:r>
+          </a:p>
+          <a:p>
+            <a:pPr>
+              <a:spcBef>
+                <a:spcPts val="200"/>
+              </a:spcBef>
+              <a:spcAft>
+                <a:spcPts val="200"/>
+              </a:spcAft>
+              <a:defRPr sz="1400">
+                <a:solidFill>
+                  <a:srgbClr val="1F4E79"/>
+                </a:solidFill>
+              </a:defRPr>
+            </a:pPr>
+            <a:r>
+              <a:t>  99.35% reduction: 12M raw to 78.5K investment-grade</a:t>
+            </a:r>
+          </a:p>
+          <a:p>
+            <a:pPr>
+              <a:spcBef>
+                <a:spcPts val="200"/>
+              </a:spcBef>
+              <a:spcAft>
+                <a:spcPts val="200"/>
+              </a:spcAft>
+              <a:defRPr sz="1400">
+                <a:solidFill>
+                  <a:srgbClr val="1F4E79"/>
+                </a:solidFill>
+              </a:defRPr>
+            </a:pPr>
+            <a:r>
+              <a:t>  Ratings improved: 6.16 to 6.35 (+0.19 points)</a:t>
+            </a:r>
+          </a:p>
+          <a:p>
+            <a:pPr>
+              <a:spcBef>
+                <a:spcPts val="200"/>
+              </a:spcBef>
+              <a:spcAft>
+                <a:spcPts val="200"/>
+              </a:spcAft>
+              <a:defRPr sz="1400">
+                <a:solidFill>
+                  <a:srgbClr val="1F4E79"/>
+                </a:solidFill>
+              </a:defRPr>
+            </a:pPr>
+          </a:p>
+          <a:p>
+            <a:pPr>
+              <a:spcBef>
+                <a:spcPts val="200"/>
+              </a:spcBef>
+              <a:spcAft>
+                <a:spcPts val="200"/>
+              </a:spcAft>
+              <a:defRPr b="1" sz="1800">
+                <a:solidFill>
+                  <a:srgbClr val="006400"/>
+                </a:solidFill>
+              </a:defRPr>
+            </a:pPr>
+            <a:r>
+              <a:t>Statistical Evidence</a:t>
+            </a:r>
+          </a:p>
+          <a:p>
+            <a:pPr>
+              <a:spcBef>
+                <a:spcPts val="200"/>
+              </a:spcBef>
+              <a:spcAft>
+                <a:spcPts val="200"/>
+              </a:spcAft>
+              <a:defRPr sz="1400">
+                <a:solidFill>
+                  <a:srgbClr val="1F4E79"/>
+                </a:solidFill>
+              </a:defRPr>
+            </a:pPr>
+            <a:r>
+              <a:t>  Hypothesis testing: p=0.032 (genres significantly different)</a:t>
+            </a:r>
+          </a:p>
+          <a:p>
+            <a:pPr>
+              <a:spcBef>
+                <a:spcPts val="200"/>
+              </a:spcBef>
+              <a:spcAft>
+                <a:spcPts val="200"/>
+              </a:spcAft>
+              <a:defRPr sz="1400">
+                <a:solidFill>
+                  <a:srgbClr val="1F4E79"/>
+                </a:solidFill>
+              </a:defRPr>
+            </a:pPr>
+            <a:r>
+              <a:t>  Model quality: RMSE 1.5-&gt;1.4, R2 24%-&gt;28%</a:t>
+            </a:r>
+          </a:p>
+          <a:p>
+            <a:pPr>
+              <a:spcBef>
+                <a:spcPts val="200"/>
+              </a:spcBef>
+              <a:spcAft>
+                <a:spcPts val="200"/>
+              </a:spcAft>
+              <a:defRPr sz="1400">
+                <a:solidFill>
+                  <a:srgbClr val="1F4E79"/>
+                </a:solidFill>
+              </a:defRPr>
+            </a:pPr>
+          </a:p>
+          <a:p>
+            <a:pPr>
+              <a:spcBef>
+                <a:spcPts val="200"/>
+              </a:spcBef>
+              <a:spcAft>
+                <a:spcPts val="200"/>
+              </a:spcAft>
+              <a:defRPr b="1" sz="1800">
+                <a:solidFill>
+                  <a:srgbClr val="006400"/>
+                </a:solidFill>
+              </a:defRPr>
+            </a:pPr>
+            <a:r>
+              <a:t>Key Recommendations</a:t>
+            </a:r>
+          </a:p>
+          <a:p>
+            <a:pPr>
+              <a:spcBef>
+                <a:spcPts val="200"/>
+              </a:spcBef>
+              <a:spcAft>
+                <a:spcPts val="200"/>
+              </a:spcAft>
+              <a:defRPr sz="1400">
+                <a:solidFill>
+                  <a:srgbClr val="1F4E79"/>
+                </a:solidFill>
+              </a:defRPr>
+            </a:pPr>
+            <a:r>
+              <a:t>  Documentary: HIGH confidence + return (7.25 rating)</a:t>
+            </a:r>
+          </a:p>
+          <a:p>
+            <a:pPr>
+              <a:spcBef>
+                <a:spcPts val="200"/>
+              </a:spcBef>
+              <a:spcAft>
+                <a:spcPts val="200"/>
+              </a:spcAft>
+              <a:defRPr sz="1400">
+                <a:solidFill>
+                  <a:srgbClr val="1F4E79"/>
+                </a:solidFill>
+              </a:defRPr>
+            </a:pPr>
+            <a:r>
+              <a:t>  Horror: LOW confidence + return (4.97 rating)</a:t>
+            </a:r>
+          </a:p>
+          <a:p>
+            <a:pPr>
+              <a:spcBef>
+                <a:spcPts val="200"/>
+              </a:spcBef>
+              <a:spcAft>
+                <a:spcPts val="200"/>
+              </a:spcAft>
+              <a:defRPr sz="1400">
+                <a:solidFill>
+                  <a:srgbClr val="1F4E79"/>
+                </a:solidFill>
+              </a:defRPr>
+            </a:pPr>
+            <a:r>
+              <a:t>  Optimal: 120-150 minute runtime (6.47 rating)</a:t>
+            </a:r>
+          </a:p>
+          <a:p>
+            <a:pPr>
+              <a:spcBef>
+                <a:spcPts val="200"/>
+              </a:spcBef>
+              <a:spcAft>
+                <a:spcPts val="200"/>
+              </a:spcAft>
+              <a:defRPr sz="1400">
+                <a:solidFill>
+                  <a:srgbClr val="1F4E79"/>
+                </a:solidFill>
+              </a:defRPr>
+            </a:pPr>
+          </a:p>
+          <a:p>
+            <a:pPr>
+              <a:spcBef>
+                <a:spcPts val="200"/>
+              </a:spcBef>
+              <a:spcAft>
+                <a:spcPts val="200"/>
+              </a:spcAft>
+              <a:defRPr b="1" sz="1800">
+                <a:solidFill>
+                  <a:srgbClr val="006400"/>
+                </a:solidFill>
+              </a:defRPr>
+            </a:pPr>
+            <a:r>
+              <a:t>Presentation</a:t>
+            </a:r>
+          </a:p>
+          <a:p>
+            <a:pPr>
+              <a:spcBef>
+                <a:spcPts val="200"/>
+              </a:spcBef>
+              <a:spcAft>
+                <a:spcPts val="200"/>
+              </a:spcAft>
+              <a:defRPr sz="1400">
+                <a:solidFill>
+                  <a:srgbClr val="1F4E79"/>
+                </a:solidFill>
+              </a:defRPr>
+            </a:pPr>
+            <a:r>
+              <a:t>  34 slides: original + quality + statistics + hypothesis + comparison</a:t>
+            </a:r>
+          </a:p>
+          <a:p>
+            <a:pPr>
+              <a:spcBef>
+                <a:spcPts val="200"/>
+              </a:spcBef>
+              <a:spcAft>
+                <a:spcPts val="200"/>
+              </a:spcAft>
+              <a:defRPr sz="1400">
+                <a:solidFill>
+                  <a:srgbClr val="1F4E79"/>
+                </a:solidFill>
+              </a:defRPr>
+            </a:pPr>
+            <a:r>
+              <a:t>  17 visualizations: 6 statistical + 5 hypothesis + 6 comparison</a:t>
             </a:r>
           </a:p>
         </p:txBody>
